--- a/lectures/Lecture 6.1 - React.pptx
+++ b/lectures/Lecture 6.1 - React.pptx
@@ -2434,7 +2434,7 @@
             </a:pPr>
             <a:r>
               <a:rPr lang="en-US"/>
-              <a:t>Three things to highlight here: className replaces class (because class is a reserved JS keyword), attributes are camelCase like htmlFor and onClick, and you really must return exactly one root element from a component. The &lt;&gt;...&lt;/&gt; syntax is a React Fragment, which is what you reach for when you don't want an extra div wrapping your children just for the sake of having one root.</a:t>
+              <a:t>A few things to highlight: className replaces class because class is a reserved JS keyword, attributes are camelCase like htmlFor and onClick, and a component really does have to return exactly one root element. The &lt;&gt;...&lt;/&gt; syntax is a React Fragment, which is what you reach for when you don't want an extra div wrapping your children just for the sake of having one root.</a:t>
             </a:r>
             <a:endParaRPr/>
           </a:p>
@@ -2616,7 +2616,7 @@
             </a:pPr>
             <a:r>
               <a:rPr lang="en-US"/>
-              <a:t>Three things to highlight here: className replaces class (because class is a reserved JS keyword), attributes are camelCase like htmlFor and onClick, and you really must return exactly one root element from a component. The &lt;&gt;...&lt;/&gt; syntax is a React Fragment, which is what you reach for when you don't want an extra div wrapping your children just for the sake of having one root.</a:t>
+              <a:t>A few things to highlight: className replaces class because class is a reserved JS keyword, attributes are camelCase like htmlFor and onClick, and a component really does have to return exactly one root element. The &lt;&gt;...&lt;/&gt; syntax is a React Fragment, which is what you reach for when you don't want an extra div wrapping your children just for the sake of having one root.</a:t>
             </a:r>
             <a:endParaRPr/>
           </a:p>
@@ -2949,7 +2949,7 @@
             </a:pPr>
             <a:r>
               <a:rPr lang="en-US"/>
-              <a:t>Three things to highlight here: className replaces class (because class is a reserved JS keyword), attributes are camelCase like htmlFor and onClick, and you really must return exactly one root element from a component. The &lt;&gt;...&lt;/&gt; syntax is a React Fragment, which is what you reach for when you don't want an extra div wrapping your children just for the sake of having one root.</a:t>
+              <a:t>A few things to highlight: className replaces class because class is a reserved JS keyword, attributes are camelCase like htmlFor and onClick, and a component really does have to return exactly one root element. The &lt;&gt;...&lt;/&gt; syntax is a React Fragment, which is what you reach for when you don't want an extra div wrapping your children just for the sake of having one root.</a:t>
             </a:r>
             <a:endParaRPr/>
           </a:p>
@@ -4792,7 +4792,7 @@
             </a:pPr>
             <a:r>
               <a:rPr lang="en-US"/>
-              <a:t>Three components, one tree. TodoApp calls TodoList, TodoList maps over todos to produce multiple TodoItems, and TodoItem renders a single li. Notice that TodoList defines its props type inline instead of via interface, which is really fine for small components and kinda not worth the ceremony of a separate interface. The `key={t.id}` is the key prop and the next section explains why it has to be there.</a:t>
+              <a:t>Three components making one tree here - TodoApp calls TodoList, TodoList maps over the todos to produce a TodoItem each, and TodoItem renders a single li. Notice that TodoList defines its props type inline instead of via interface, which is really fine for small components and kinda not worth the ceremony of a separate interface. The `key={t.id}` is the key prop and the next section explains why it has to be there.</a:t>
             </a:r>
             <a:endParaRPr/>
           </a:p>
@@ -5396,7 +5396,7 @@
             </a:pPr>
             <a:r>
               <a:rPr lang="en-US"/>
-              <a:t>Everything is really here in one slide: props typed via interface, early return for the empty case, .map with a key prop, and each element is a component call. This is the shape of 80% of React list rendering you'll ever write, so students should be able to read it fluently by the end of class.</a:t>
+              <a:t>It's all really on the one slide here - props typed via interface, an early return for the empty case, .map with a key prop, and every element being a component call. This is the shape of 80% of React list rendering you'll ever write, so students should be able to read it fluently by the end of class.</a:t>
             </a:r>
             <a:endParaRPr/>
           </a:p>
@@ -5547,7 +5547,7 @@
             </a:pPr>
             <a:r>
               <a:rPr lang="en-US"/>
-              <a:t>Three patterns here: ternary for if/else inside JSX, short-circuit &amp;&amp; for show-or-nothing, and early return for whole-component branches. All three are really just plain JavaScript expressions and nothing about them is React-specific - students already know them from 5.1, they just haven't used them in this context yet.</a:t>
+              <a:t>The patterns here are a ternary for if/else inside JSX, a short-circuit &amp;&amp; when it's show-or-nothing, and an early return when the whole component branches. All of it is really just plain JavaScript expressions and none of it is React-specific - students already know them from 5.1, they just haven't used them in this context yet.</a:t>
             </a:r>
             <a:endParaRPr/>
           </a:p>
@@ -5698,7 +5698,7 @@
             </a:pPr>
             <a:r>
               <a:rPr lang="en-US"/>
-              <a:t>Three patterns here: ternary for if/else inside JSX, short-circuit &amp;&amp; for show-or-nothing, and early return for whole-component branches. All three are really just plain JavaScript expressions and nothing about them is React-specific - students already know them from 5.1, they just haven't used them in this context yet.</a:t>
+              <a:t>The patterns here are a ternary for if/else inside JSX, a short-circuit &amp;&amp; when it's show-or-nothing, and an early return when the whole component branches. All of it is really just plain JavaScript expressions and none of it is React-specific - students already know them from 5.1, they just haven't used them in this context yet.</a:t>
             </a:r>
             <a:endParaRPr/>
           </a:p>
@@ -5849,7 +5849,7 @@
             </a:pPr>
             <a:r>
               <a:rPr lang="en-US"/>
-              <a:t>Vite is really the standard modern React toolchain at this point. One command to create the project, one to install dependencies, one to run the dev server. The dev server has hot module reloading, so save a file and the browser updates without losing state - which is kinda magical the first time you see it. src/App.tsx is the root component. Students should spend at least 10 minutes of this class with a running project open on their own laptop, otherwise none of this sticks.</a:t>
+              <a:t>Vite is really the standard modern React toolchain at this point. It's a command to create the project, another to install the dependencies, and one more to run the dev server. The dev server has hot module reloading, so save a file and the browser updates without losing state - which is kinda magical the first time you see it. src/App.tsx is the root component. Students should spend at least 10 minutes of this class with a running project open on their own laptop, otherwise none of this sticks.</a:t>
             </a:r>
             <a:endParaRPr/>
           </a:p>
@@ -7117,7 +7117,7 @@
             </a:pPr>
             <a:r>
               <a:rPr lang="en-US"/>
-              <a:t>Svelte looks structurally like Vue but the magic is at BUILD TIME instead of run time. The compiler reads this component and emits hand-rolled DOM-mutation code - the kind of code we showed on the vanilla-JS slide - so the browser never runs a virtual-DOM diff. Result: the smallest bundle of any of these frameworks and the fastest first paint. {#each ... as t (t.id)} is the loop with key tracking; class:done={t.done} conditionally applies the .done class. Worth saying: a lot of people think Svelte has the best developer experience of the bunch - React just has the bigger ecosystem.</a:t>
+              <a:t>Svelte looks structurally like Vue but the magic is at BUILD TIME instead of run time. The compiler reads this component and emits hand-rolled DOM-mutation code, the same kind of code we put up on the vanilla-JS slide, so the browser never runs a virtual-DOM diff at all...which gets you the smallest bundle of any of these frameworks and the fastest first paint. {#each ... as t (t.id)} is the loop with key tracking; class:done={t.done} conditionally applies the .done class. Worth saying: a lot of people think Svelte has the best developer experience of the bunch - React just has the bigger ecosystem.</a:t>
             </a:r>
             <a:endParaRPr/>
           </a:p>
@@ -8023,7 +8023,7 @@
             </a:pPr>
             <a:r>
               <a:rPr lang="en-US"/>
-              <a:t>AbortController is the modern, idiomatic answer. It's also EXACTLY the pattern React's useEffect cleanup uses, which is a really nice forward-reference for next class - when they see useEffect returning a cleanup function, they'll recognize this. Walk through it: each new call aborts the previous controller, makes a fresh one, passes the signal into fetch, and the catch ignores AbortError because that rejection was on purpose. The alternative pattern (track a request id and ignore stale responses) works too, but AbortController also saves the network round trip, so it wins on both correctness AND efficiency.</a:t>
+              <a:t>AbortController is the modern, idiomatic answer. It's also EXACTLY the pattern React's useEffect cleanup uses, which is a really nice forward-reference for next class - when they see useEffect returning a cleanup function, they'll recognize this. Walk through it: each new call aborts the previous controller, makes a fresh one, passes the signal into fetch, and the catch ignores AbortError because that rejection was on purpose. The alternative pattern, where you track a request id and ignore the stale responses, works fine too - AbortController just also saves you the network round trip on the way.</a:t>
             </a:r>
             <a:endParaRPr/>
           </a:p>
@@ -8476,7 +8476,7 @@
             </a:pPr>
             <a:r>
               <a:rPr lang="en-US"/>
-              <a:t>The two-thing shape of useState's return value is the single most confusing part for students who are new to hooks. Hammer on three things: you always destructure it, you always call it at the top of the component, and the names are up to you but the convention everyone reads is [thing, setThing]. If their coding agent writes [thingState, updateThing], push it back toward the convention - readability across the ecosystem matters.</a:t>
+              <a:t>The two-thing shape of useState's return value is the single most confusing part for students who are new to hooks. Hammer on it: you always destructure it, you always call it at the top of the component, and the names are technically up to you but the convention everybody reads is [thing, setThing]. If their coding agent writes [thingState, updateThing], push it back toward the convention - readability across the ecosystem matters.</a:t>
             </a:r>
             <a:endParaRPr/>
           </a:p>
@@ -9262,7 +9262,7 @@
             </a:pPr>
             <a:r>
               <a:rPr lang="en-US"/>
-              <a:t>AbortController is the modern, idiomatic answer. It's also EXACTLY the pattern React's useEffect cleanup uses, which is a really nice forward-reference for next class - when they see useEffect returning a cleanup function, they'll recognize this. Walk through it: each new call aborts the previous controller, makes a fresh one, passes the signal into fetch, and the catch ignores AbortError because that rejection was on purpose. The alternative pattern (track a request id and ignore stale responses) works too, but AbortController also saves the network round trip, so it wins on both correctness AND efficiency.</a:t>
+              <a:t>AbortController is the modern, idiomatic answer. It's also EXACTLY the pattern React's useEffect cleanup uses, which is a really nice forward-reference for next class - when they see useEffect returning a cleanup function, they'll recognize this. Walk through it: each new call aborts the previous controller, makes a fresh one, passes the signal into fetch, and the catch ignores AbortError because that rejection was on purpose. The alternative pattern, where you track a request id and ignore the stale responses, works fine too - AbortController just also saves you the network round trip on the way.</a:t>
             </a:r>
             <a:endParaRPr/>
           </a:p>

--- a/lectures/Lecture 6.1 - React.pptx
+++ b/lectures/Lecture 6.1 - React.pptx
@@ -986,22 +986,7 @@
             <a:noAutofit/>
           </a:bodyPr>
           <a:lstStyle/>
-          <a:p>
-            <a:pPr indent="0" lvl="0" marL="0" rtl="0" algn="l">
-              <a:spcBef>
-                <a:spcPts val="0"/>
-              </a:spcBef>
-              <a:spcAft>
-                <a:spcPts val="0"/>
-              </a:spcAft>
-              <a:buNone/>
-            </a:pPr>
-            <a:r>
-              <a:rPr lang="en-US"/>
-              <a:t>Now the mechanics start. Everything here really follows from the one line 'a component is a function' - if you keep coming back to that, the rest lands.</a:t>
-            </a:r>
-            <a:endParaRPr/>
-          </a:p>
+          <a:p/>
         </p:txBody>
       </p:sp>
       <p:sp>
@@ -1138,20 +1123,9 @@
           </a:bodyPr>
           <a:lstStyle/>
           <a:p>
-            <a:pPr indent="0" lvl="0" marL="0" rtl="0" algn="l">
-              <a:spcBef>
-                <a:spcPts val="0"/>
-              </a:spcBef>
-              <a:spcAft>
-                <a:spcPts val="0"/>
-              </a:spcAft>
-              <a:buNone/>
-            </a:pPr>
-            <a:r>
-              <a:rPr lang="en-US"/>
-              <a:t>The capital-letter rule is one of the most common sources of silent bugs for beginners...really, a lowercase &lt;button&gt; renders an HTML button and an uppercase &lt;Button&gt; calls a component, and if you get the case wrong React either renders the wrong thing or just errors out with a kinda cryptic message. Worth calling out early so students recognize the failure mode when it shows up.</a:t>
-            </a:r>
-            <a:endParaRPr/>
+            <a:r>
+              <a:t>Wrong case gives a cryptic error or renders the wrong thing.</a:t>
+            </a:r>
           </a:p>
         </p:txBody>
       </p:sp>
@@ -1289,20 +1263,9 @@
           </a:bodyPr>
           <a:lstStyle/>
           <a:p>
-            <a:pPr indent="0" lvl="0" marL="0" rtl="0" algn="l">
-              <a:spcBef>
-                <a:spcPts val="0"/>
-              </a:spcBef>
-              <a:spcAft>
-                <a:spcPts val="0"/>
-              </a:spcAft>
-              <a:buNone/>
-            </a:pPr>
-            <a:r>
-              <a:rPr lang="en-US"/>
-              <a:t>Walk through every piece. The interface is familiar from 5.1 so don't dwell there. The function takes props and destructures them in the parameter list, which is just regular JS. The return value uses JSX and we'll get into that in the next section. The App component uses Greeting like an HTML tag - that's really the JSX calling convention, not a special React thing.</a:t>
-            </a:r>
-            <a:endParaRPr/>
+            <a:r>
+              <a:t>Interface is 5.1 material, skip it. Greeting as a tag is JSX call syntax.</a:t>
+            </a:r>
           </a:p>
         </p:txBody>
       </p:sp>
@@ -1440,20 +1403,9 @@
           </a:bodyPr>
           <a:lstStyle/>
           <a:p>
-            <a:pPr indent="0" lvl="0" marL="0" rtl="0" algn="l">
-              <a:spcBef>
-                <a:spcPts val="0"/>
-              </a:spcBef>
-              <a:spcAft>
-                <a:spcPts val="0"/>
-              </a:spcAft>
-              <a:buNone/>
-            </a:pPr>
-            <a:r>
-              <a:rPr lang="en-US"/>
-              <a:t>Walk through every piece. The interface is familiar from 5.1 so don't dwell there. The function takes props and destructures them in the parameter list, which is just regular JS. The return value uses JSX and we'll get into that in the next section. The App component uses Greeting like an HTML tag - that's really the JSX calling convention, not a special React thing.</a:t>
-            </a:r>
-            <a:endParaRPr/>
+            <a:r>
+              <a:t>Interface is 5.1 material, skip it. Greeting as a tag is JSX call syntax.</a:t>
+            </a:r>
           </a:p>
         </p:txBody>
       </p:sp>
@@ -1591,20 +1543,9 @@
           </a:bodyPr>
           <a:lstStyle/>
           <a:p>
-            <a:pPr indent="0" lvl="0" marL="0" rtl="0" algn="l">
-              <a:spcBef>
-                <a:spcPts val="0"/>
-              </a:spcBef>
-              <a:spcAft>
-                <a:spcPts val="0"/>
-              </a:spcAft>
-              <a:buNone/>
-            </a:pPr>
-            <a:r>
-              <a:rPr lang="en-US"/>
-              <a:t>Quick 2 minutes, no need to draw it out. Cold-call one or two students. Things they should surface: (a) IT'S NOT A STRING - you can put {name} in the middle     and reference a JS variable, which strings can't do     without template literals. (b) IT'S A FUNCTION CALL IN DISGUISE - something like     createElement('h1', null, 'Hello, ', name, '!'). (c) IT EVALUATES TO AN OBJECT - a plain JS object that     describes the UI tree. React reads that object and     figures out what to put on the page. If they don't reach (b)/(c), that's fine - the next slide reveals it and the question still primed them to look for the trick. Don't overspend here.</a:t>
-            </a:r>
-            <a:endParaRPr/>
+            <a:r>
+              <a:t>2 min, cold-call two. Want: not a string, createElement call, evaluates to an object.</a:t>
+            </a:r>
           </a:p>
         </p:txBody>
       </p:sp>
@@ -1741,22 +1682,7 @@
             <a:noAutofit/>
           </a:bodyPr>
           <a:lstStyle/>
-          <a:p>
-            <a:pPr indent="0" lvl="0" marL="0" rtl="0" algn="l">
-              <a:spcBef>
-                <a:spcPts val="0"/>
-              </a:spcBef>
-              <a:spcAft>
-                <a:spcPts val="0"/>
-              </a:spcAft>
-              <a:buNone/>
-            </a:pPr>
-            <a:r>
-              <a:rPr lang="en-US"/>
-              <a:t>JSX is the part that confuses students the most. Really the fix is to ground it in the fact that it's just a compile-time transformation into plain function calls - same demystification move we made for async/await in 5.2.</a:t>
-            </a:r>
-            <a:endParaRPr/>
-          </a:p>
+          <a:p/>
         </p:txBody>
       </p:sp>
       <p:sp>
@@ -1893,129 +1819,9 @@
           </a:bodyPr>
           <a:lstStyle/>
           <a:p>
-            <a:pPr indent="0" lvl="0" marL="0" rtl="0" algn="l">
-              <a:spcBef>
-                <a:spcPts val="0"/>
-              </a:spcBef>
-              <a:spcAft>
-                <a:spcPts val="0"/>
-              </a:spcAft>
-              <a:buNone/>
-            </a:pPr>
-            <a:r>
-              <a:rPr lang="en-US"/>
-              <a:t>The same move we made for async/await in 5.2 works here: show the ugly version once, never write it again, but keep the mental model.</a:t>
-            </a:r>
-            <a:endParaRPr/>
-          </a:p>
-          <a:p>
-            <a:pPr indent="0" lvl="0" marL="0" rtl="0" algn="l">
-              <a:spcBef>
-                <a:spcPts val="0"/>
-              </a:spcBef>
-              <a:spcAft>
-                <a:spcPts val="0"/>
-              </a:spcAft>
-              <a:buNone/>
-            </a:pPr>
-            <a:r>
-              <a:t/>
-            </a:r>
-            <a:endParaRPr/>
-          </a:p>
-          <a:p>
-            <a:pPr indent="0" lvl="0" marL="0" rtl="0" algn="l">
-              <a:spcBef>
-                <a:spcPts val="0"/>
-              </a:spcBef>
-              <a:spcAft>
-                <a:spcPts val="0"/>
-              </a:spcAft>
-              <a:buNone/>
-            </a:pPr>
-            <a:r>
-              <a:rPr lang="en-US"/>
-              <a:t>createElement(type, props, ...children)</a:t>
-            </a:r>
-            <a:endParaRPr/>
-          </a:p>
-          <a:p>
-            <a:pPr indent="0" lvl="0" marL="0" rtl="0" algn="l">
-              <a:spcBef>
-                <a:spcPts val="0"/>
-              </a:spcBef>
-              <a:spcAft>
-                <a:spcPts val="0"/>
-              </a:spcAft>
-              <a:buNone/>
-            </a:pPr>
-            <a:r>
-              <a:rPr lang="en-US"/>
-              <a:t>null = props in the header h1</a:t>
-            </a:r>
-            <a:endParaRPr/>
-          </a:p>
-          <a:p>
-            <a:pPr indent="0" lvl="0" marL="0" rtl="0" algn="l">
-              <a:spcBef>
-                <a:spcPts val="0"/>
-              </a:spcBef>
-              <a:spcAft>
-                <a:spcPts val="0"/>
-              </a:spcAft>
-              <a:buNone/>
-            </a:pPr>
-            <a:r>
-              <a:t/>
-            </a:r>
-            <a:endParaRPr/>
-          </a:p>
-          <a:p>
-            <a:pPr indent="0" lvl="0" marL="0" rtl="0" algn="l">
-              <a:spcBef>
-                <a:spcPts val="0"/>
-              </a:spcBef>
-              <a:spcAft>
-                <a:spcPts val="0"/>
-              </a:spcAft>
-              <a:buNone/>
-            </a:pPr>
-            <a:r>
-              <a:rPr lang="en-US"/>
-              <a:t>_jsxs("h1", { children: ["Hello, ", name, "!"] })                                                                                      </a:t>
-            </a:r>
-            <a:endParaRPr/>
-          </a:p>
-          <a:p>
-            <a:pPr indent="0" lvl="0" marL="0" rtl="0" algn="l">
-              <a:spcBef>
-                <a:spcPts val="0"/>
-              </a:spcBef>
-              <a:spcAft>
-                <a:spcPts val="0"/>
-              </a:spcAft>
-              <a:buNone/>
-            </a:pPr>
-            <a:r>
-              <a:rPr lang="en-US"/>
-              <a:t>Children live inside the props object under a children key.</a:t>
-            </a:r>
-            <a:endParaRPr/>
-          </a:p>
-          <a:p>
-            <a:pPr indent="0" lvl="0" marL="0" rtl="0" algn="l">
-              <a:spcBef>
-                <a:spcPts val="0"/>
-              </a:spcBef>
-              <a:spcAft>
-                <a:spcPts val="0"/>
-              </a:spcAft>
-              <a:buNone/>
-            </a:pPr>
-            <a:r>
-              <a:t/>
-            </a:r>
-            <a:endParaRPr/>
+            <a:r>
+              <a:t>Same move as async/await in 5.2. Modern build emits `_jsxs`; children live under props.</a:t>
+            </a:r>
           </a:p>
         </p:txBody>
       </p:sp>
@@ -2153,139 +1959,9 @@
           </a:bodyPr>
           <a:lstStyle/>
           <a:p>
-            <a:pPr indent="0" lvl="0" marL="0" rtl="0" algn="l">
-              <a:spcBef>
-                <a:spcPts val="0"/>
-              </a:spcBef>
-              <a:spcAft>
-                <a:spcPts val="0"/>
-              </a:spcAft>
-              <a:buNone/>
-            </a:pPr>
-            <a:r>
-              <a:rPr lang="en-US"/>
-              <a:t>The same move we made for async/await in 5.2 works here: show the ugly version once, never write it again, but keep the mental model.</a:t>
-            </a:r>
-            <a:endParaRPr/>
-          </a:p>
-          <a:p>
-            <a:pPr indent="0" lvl="0" marL="0" rtl="0" algn="l">
-              <a:spcBef>
-                <a:spcPts val="0"/>
-              </a:spcBef>
-              <a:spcAft>
-                <a:spcPts val="0"/>
-              </a:spcAft>
-              <a:buNone/>
-            </a:pPr>
-            <a:r>
-              <a:t/>
-            </a:r>
-            <a:endParaRPr/>
-          </a:p>
-          <a:p>
-            <a:pPr indent="0" lvl="0" marL="0" rtl="0" algn="l">
-              <a:spcBef>
-                <a:spcPts val="0"/>
-              </a:spcBef>
-              <a:spcAft>
-                <a:spcPts val="0"/>
-              </a:spcAft>
-              <a:buNone/>
-            </a:pPr>
-            <a:r>
-              <a:rPr lang="en-US"/>
-              <a:t>createElement(type, props, ...children)</a:t>
-            </a:r>
-            <a:endParaRPr/>
-          </a:p>
-          <a:p>
-            <a:pPr indent="0" lvl="0" marL="0" rtl="0" algn="l">
-              <a:spcBef>
-                <a:spcPts val="0"/>
-              </a:spcBef>
-              <a:spcAft>
-                <a:spcPts val="0"/>
-              </a:spcAft>
-              <a:buNone/>
-            </a:pPr>
-            <a:r>
-              <a:rPr lang="en-US"/>
-              <a:t>null = props in the header h1</a:t>
-            </a:r>
-            <a:endParaRPr/>
-          </a:p>
-          <a:p>
-            <a:pPr indent="0" lvl="0" marL="0" rtl="0" algn="l">
-              <a:spcBef>
-                <a:spcPts val="0"/>
-              </a:spcBef>
-              <a:spcAft>
-                <a:spcPts val="0"/>
-              </a:spcAft>
-              <a:buNone/>
-            </a:pPr>
-            <a:r>
-              <a:t/>
-            </a:r>
-            <a:endParaRPr/>
-          </a:p>
-          <a:p>
-            <a:pPr indent="0" lvl="0" marL="0" rtl="0" algn="l">
-              <a:spcBef>
-                <a:spcPts val="0"/>
-              </a:spcBef>
-              <a:spcAft>
-                <a:spcPts val="0"/>
-              </a:spcAft>
-              <a:buClr>
-                <a:schemeClr val="dk1"/>
-              </a:buClr>
-              <a:buSzPts val="1100"/>
-              <a:buFont typeface="Arial"/>
-              <a:buNone/>
-            </a:pPr>
-            <a:r>
-              <a:rPr lang="en-US"/>
-              <a:t>_jsxs("h1", { children: ["Hello, ", name, "!"] })                                                                                      </a:t>
-            </a:r>
-            <a:endParaRPr/>
-          </a:p>
-          <a:p>
-            <a:pPr indent="0" lvl="0" marL="0" rtl="0" algn="l">
-              <a:spcBef>
-                <a:spcPts val="0"/>
-              </a:spcBef>
-              <a:spcAft>
-                <a:spcPts val="0"/>
-              </a:spcAft>
-              <a:buClr>
-                <a:schemeClr val="dk1"/>
-              </a:buClr>
-              <a:buSzPts val="1100"/>
-              <a:buFont typeface="Arial"/>
-              <a:buNone/>
-            </a:pPr>
-            <a:r>
-              <a:rPr lang="en-US"/>
-              <a:t>Children live inside the props object under a children key.</a:t>
-            </a:r>
-            <a:endParaRPr/>
-          </a:p>
-          <a:p>
-            <a:pPr indent="0" lvl="0" marL="0" rtl="0" algn="l">
-              <a:spcBef>
-                <a:spcPts val="0"/>
-              </a:spcBef>
-              <a:spcAft>
-                <a:spcPts val="0"/>
-              </a:spcAft>
-              <a:buNone/>
-            </a:pPr>
-            <a:r>
-              <a:t/>
-            </a:r>
-            <a:endParaRPr/>
+            <a:r>
+              <a:t>Same move as async/await in 5.2. Modern build emits `_jsxs`; children live under props.</a:t>
+            </a:r>
           </a:p>
         </p:txBody>
       </p:sp>
@@ -2422,53 +2098,7 @@
             <a:noAutofit/>
           </a:bodyPr>
           <a:lstStyle/>
-          <a:p>
-            <a:pPr indent="0" lvl="0" marL="0" rtl="0" algn="l">
-              <a:spcBef>
-                <a:spcPts val="0"/>
-              </a:spcBef>
-              <a:spcAft>
-                <a:spcPts val="0"/>
-              </a:spcAft>
-              <a:buNone/>
-            </a:pPr>
-            <a:r>
-              <a:rPr lang="en-US"/>
-              <a:t>A few things to highlight: className replaces class because class is a reserved JS keyword, attributes are camelCase like htmlFor and onClick, and a component really does have to return exactly one root element. The &lt;&gt;...&lt;/&gt; syntax is a React Fragment, which is what you reach for when you don't want an extra div wrapping your children just for the sake of having one root.</a:t>
-            </a:r>
-            <a:endParaRPr/>
-          </a:p>
-          <a:p>
-            <a:pPr indent="0" lvl="0" marL="0" rtl="0" algn="l">
-              <a:spcBef>
-                <a:spcPts val="0"/>
-              </a:spcBef>
-              <a:spcAft>
-                <a:spcPts val="0"/>
-              </a:spcAft>
-              <a:buNone/>
-            </a:pPr>
-            <a:r>
-              <a:t/>
-            </a:r>
-            <a:endParaRPr/>
-          </a:p>
-          <a:p>
-            <a:pPr indent="0" lvl="0" marL="0" rtl="0" algn="l">
-              <a:spcBef>
-                <a:spcPts val="0"/>
-              </a:spcBef>
-              <a:spcAft>
-                <a:spcPts val="0"/>
-              </a:spcAft>
-              <a:buNone/>
-            </a:pPr>
-            <a:r>
-              <a:rPr lang="en-US"/>
-              <a:t>JSX is JavaScript describing JS objects, not HTML.</a:t>
-            </a:r>
-            <a:endParaRPr/>
-          </a:p>
+          <a:p/>
         </p:txBody>
       </p:sp>
       <p:sp>
@@ -2604,53 +2234,7 @@
             <a:noAutofit/>
           </a:bodyPr>
           <a:lstStyle/>
-          <a:p>
-            <a:pPr indent="0" lvl="0" marL="0" rtl="0" algn="l">
-              <a:spcBef>
-                <a:spcPts val="0"/>
-              </a:spcBef>
-              <a:spcAft>
-                <a:spcPts val="0"/>
-              </a:spcAft>
-              <a:buNone/>
-            </a:pPr>
-            <a:r>
-              <a:rPr lang="en-US"/>
-              <a:t>A few things to highlight: className replaces class because class is a reserved JS keyword, attributes are camelCase like htmlFor and onClick, and a component really does have to return exactly one root element. The &lt;&gt;...&lt;/&gt; syntax is a React Fragment, which is what you reach for when you don't want an extra div wrapping your children just for the sake of having one root.</a:t>
-            </a:r>
-            <a:endParaRPr/>
-          </a:p>
-          <a:p>
-            <a:pPr indent="0" lvl="0" marL="0" rtl="0" algn="l">
-              <a:spcBef>
-                <a:spcPts val="0"/>
-              </a:spcBef>
-              <a:spcAft>
-                <a:spcPts val="0"/>
-              </a:spcAft>
-              <a:buNone/>
-            </a:pPr>
-            <a:r>
-              <a:t/>
-            </a:r>
-            <a:endParaRPr/>
-          </a:p>
-          <a:p>
-            <a:pPr indent="0" lvl="0" marL="0" rtl="0" algn="l">
-              <a:spcBef>
-                <a:spcPts val="0"/>
-              </a:spcBef>
-              <a:spcAft>
-                <a:spcPts val="0"/>
-              </a:spcAft>
-              <a:buNone/>
-            </a:pPr>
-            <a:r>
-              <a:rPr lang="en-US"/>
-              <a:t>JSX is JavaScript describing JS objects, not HTML.</a:t>
-            </a:r>
-            <a:endParaRPr/>
-          </a:p>
+          <a:p/>
         </p:txBody>
       </p:sp>
       <p:sp>
@@ -2786,22 +2370,7 @@
             <a:noAutofit/>
           </a:bodyPr>
           <a:lstStyle/>
-          <a:p>
-            <a:pPr indent="0" lvl="0" marL="0" rtl="0" algn="l">
-              <a:spcBef>
-                <a:spcPts val="0"/>
-              </a:spcBef>
-              <a:spcAft>
-                <a:spcPts val="0"/>
-              </a:spcAft>
-              <a:buNone/>
-            </a:pPr>
-            <a:r>
-              <a:rPr lang="en-US"/>
-              <a:t>Continue directly from 5.2. Really the job of this section is to make the vanilla-JS pain concrete before the framework shows up, otherwise React lands as a tool looking for a problem.</a:t>
-            </a:r>
-            <a:endParaRPr/>
-          </a:p>
+          <a:p/>
         </p:txBody>
       </p:sp>
       <p:sp>
@@ -2937,53 +2506,7 @@
             <a:noAutofit/>
           </a:bodyPr>
           <a:lstStyle/>
-          <a:p>
-            <a:pPr indent="0" lvl="0" marL="0" rtl="0" algn="l">
-              <a:spcBef>
-                <a:spcPts val="0"/>
-              </a:spcBef>
-              <a:spcAft>
-                <a:spcPts val="0"/>
-              </a:spcAft>
-              <a:buNone/>
-            </a:pPr>
-            <a:r>
-              <a:rPr lang="en-US"/>
-              <a:t>A few things to highlight: className replaces class because class is a reserved JS keyword, attributes are camelCase like htmlFor and onClick, and a component really does have to return exactly one root element. The &lt;&gt;...&lt;/&gt; syntax is a React Fragment, which is what you reach for when you don't want an extra div wrapping your children just for the sake of having one root.</a:t>
-            </a:r>
-            <a:endParaRPr/>
-          </a:p>
-          <a:p>
-            <a:pPr indent="0" lvl="0" marL="0" rtl="0" algn="l">
-              <a:spcBef>
-                <a:spcPts val="0"/>
-              </a:spcBef>
-              <a:spcAft>
-                <a:spcPts val="0"/>
-              </a:spcAft>
-              <a:buNone/>
-            </a:pPr>
-            <a:r>
-              <a:t/>
-            </a:r>
-            <a:endParaRPr/>
-          </a:p>
-          <a:p>
-            <a:pPr indent="0" lvl="0" marL="0" rtl="0" algn="l">
-              <a:spcBef>
-                <a:spcPts val="0"/>
-              </a:spcBef>
-              <a:spcAft>
-                <a:spcPts val="0"/>
-              </a:spcAft>
-              <a:buNone/>
-            </a:pPr>
-            <a:r>
-              <a:rPr lang="en-US"/>
-              <a:t>JSX is JavaScript describing JS objects, not HTML.</a:t>
-            </a:r>
-            <a:endParaRPr/>
-          </a:p>
+          <a:p/>
         </p:txBody>
       </p:sp>
       <p:sp>
@@ -3119,22 +2642,7 @@
             <a:noAutofit/>
           </a:bodyPr>
           <a:lstStyle/>
-          <a:p>
-            <a:pPr indent="0" lvl="0" marL="0" rtl="0" algn="l">
-              <a:spcBef>
-                <a:spcPts val="0"/>
-              </a:spcBef>
-              <a:spcAft>
-                <a:spcPts val="0"/>
-              </a:spcAft>
-              <a:buNone/>
-            </a:pPr>
-            <a:r>
-              <a:rPr lang="en-US"/>
-              <a:t>These are really the three mistakes every new React student makes in their first hour on it. Calling them out explicitly means students recognize the error when it happens, instead of sitting there confused about why the button won't style...which is kinda the worst way to learn React.</a:t>
-            </a:r>
-            <a:endParaRPr/>
-          </a:p>
+          <a:p/>
         </p:txBody>
       </p:sp>
       <p:sp>
@@ -3270,22 +2778,7 @@
             <a:noAutofit/>
           </a:bodyPr>
           <a:lstStyle/>
-          <a:p>
-            <a:pPr indent="0" lvl="0" marL="0" rtl="0" algn="l">
-              <a:spcBef>
-                <a:spcPts val="0"/>
-              </a:spcBef>
-              <a:spcAft>
-                <a:spcPts val="0"/>
-              </a:spcAft>
-              <a:buNone/>
-            </a:pPr>
-            <a:r>
-              <a:rPr lang="en-US"/>
-              <a:t>These are really the three mistakes every new React student makes in their first hour on it. Calling them out explicitly means students recognize the error when it happens, instead of sitting there confused about why the button won't style...which is kinda the worst way to learn React.</a:t>
-            </a:r>
-            <a:endParaRPr/>
-          </a:p>
+          <a:p/>
         </p:txBody>
       </p:sp>
       <p:sp>
@@ -3421,22 +2914,7 @@
             <a:noAutofit/>
           </a:bodyPr>
           <a:lstStyle/>
-          <a:p>
-            <a:pPr indent="0" lvl="0" marL="0" rtl="0" algn="l">
-              <a:spcBef>
-                <a:spcPts val="0"/>
-              </a:spcBef>
-              <a:spcAft>
-                <a:spcPts val="0"/>
-              </a:spcAft>
-              <a:buNone/>
-            </a:pPr>
-            <a:r>
-              <a:rPr lang="en-US"/>
-              <a:t>Props are really just function parameters, and TypeScript makes the types explicit via interface, same pattern we used in 5.1.</a:t>
-            </a:r>
-            <a:endParaRPr/>
-          </a:p>
+          <a:p/>
         </p:txBody>
       </p:sp>
       <p:sp>
@@ -3573,20 +3051,9 @@
           </a:bodyPr>
           <a:lstStyle/>
           <a:p>
-            <a:pPr indent="0" lvl="0" marL="0" rtl="0" algn="l">
-              <a:spcBef>
-                <a:spcPts val="0"/>
-              </a:spcBef>
-              <a:spcAft>
-                <a:spcPts val="0"/>
-              </a:spcAft>
-              <a:buNone/>
-            </a:pPr>
-            <a:r>
-              <a:rPr lang="en-US"/>
-              <a:t>The string-vs-brace distinction is worth calling out explicitly. Strings can technically use quotes OR braces, but quotes are really more idiomatic for bare string literals. Anything else - number, boolean, object, function, array - has to go in braces, because JSX attributes default to strings and that's the escape hatch into a real JS expression.</a:t>
-            </a:r>
-            <a:endParaRPr/>
+            <a:r>
+              <a:t>Attributes default to strings; braces are the escape into a JS expression.</a:t>
+            </a:r>
           </a:p>
         </p:txBody>
       </p:sp>
@@ -3724,20 +3191,9 @@
           </a:bodyPr>
           <a:lstStyle/>
           <a:p>
-            <a:pPr indent="0" lvl="0" marL="0" rtl="0" algn="l">
-              <a:spcBef>
-                <a:spcPts val="0"/>
-              </a:spcBef>
-              <a:spcAft>
-                <a:spcPts val="0"/>
-              </a:spcAft>
-              <a:buNone/>
-            </a:pPr>
-            <a:r>
-              <a:rPr lang="en-US"/>
-              <a:t>The string-vs-brace distinction is worth calling out explicitly. Strings can technically use quotes OR braces, but quotes are really more idiomatic for bare string literals. Anything else - number, boolean, object, function, array - has to go in braces, because JSX attributes default to strings and that's the escape hatch into a real JS expression.</a:t>
-            </a:r>
-            <a:endParaRPr/>
+            <a:r>
+              <a:t>Attributes default to strings; braces are the escape into a JS expression.</a:t>
+            </a:r>
           </a:p>
         </p:txBody>
       </p:sp>
@@ -3874,22 +3330,7 @@
             <a:noAutofit/>
           </a:bodyPr>
           <a:lstStyle/>
-          <a:p>
-            <a:pPr indent="0" lvl="0" marL="0" rtl="0" algn="l">
-              <a:spcBef>
-                <a:spcPts val="0"/>
-              </a:spcBef>
-              <a:spcAft>
-                <a:spcPts val="0"/>
-              </a:spcAft>
-              <a:buNone/>
-            </a:pPr>
-            <a:r>
-              <a:rPr lang="en-US"/>
-              <a:t>The interface really just describes what TodoItem expects. Destructuring in the parameter list means `todo` is available as a local variable inside the function, which kinda reads nicer than props.todo sprinkled everywhere. The className={...} uses a JS expression to pick between two class names based on the done flag, which is one of those patterns students will reach for constantly.</a:t>
-            </a:r>
-            <a:endParaRPr/>
-          </a:p>
+          <a:p/>
         </p:txBody>
       </p:sp>
       <p:sp>
@@ -4026,20 +3467,9 @@
           </a:bodyPr>
           <a:lstStyle/>
           <a:p>
-            <a:pPr indent="0" lvl="0" marL="0" rtl="0" algn="l">
-              <a:spcBef>
-                <a:spcPts val="0"/>
-              </a:spcBef>
-              <a:spcAft>
-                <a:spcPts val="0"/>
-              </a:spcAft>
-              <a:buNone/>
-            </a:pPr>
-            <a:r>
-              <a:rPr lang="en-US"/>
-              <a:t>Two ways to pass a todo here: a variable reference, or an inline object literal. Both work equally well. The double-braces in {{ id: 2, ... }} are NOT special React syntax - one set of braces is for the JSX expression, the other set is for the object literal inside. Students read it as some sort of magic the first time and it really isn't, it's just two things stacked.</a:t>
-            </a:r>
-            <a:endParaRPr/>
+            <a:r>
+              <a:t>Double braces are not special syntax: JSX expression outside, object literal inside.</a:t>
+            </a:r>
           </a:p>
         </p:txBody>
       </p:sp>
@@ -4177,20 +3607,9 @@
           </a:bodyPr>
           <a:lstStyle/>
           <a:p>
-            <a:pPr indent="0" lvl="0" marL="0" rtl="0" algn="l">
-              <a:spcBef>
-                <a:spcPts val="0"/>
-              </a:spcBef>
-              <a:spcAft>
-                <a:spcPts val="0"/>
-              </a:spcAft>
-              <a:buNone/>
-            </a:pPr>
-            <a:r>
-              <a:rPr lang="en-US"/>
-              <a:t>Two ways to pass a todo here: a variable reference, or an inline object literal. Both work equally well. The double-braces in {{ id: 2, ... }} are NOT special React syntax - one set of braces is for the JSX expression, the other set is for the object literal inside. Students read it as some sort of magic the first time and it really isn't, it's just two things stacked.</a:t>
-            </a:r>
-            <a:endParaRPr/>
+            <a:r>
+              <a:t>Double braces are not special syntax: JSX expression outside, object literal inside.</a:t>
+            </a:r>
           </a:p>
         </p:txBody>
       </p:sp>
@@ -4328,20 +3747,9 @@
           </a:bodyPr>
           <a:lstStyle/>
           <a:p>
-            <a:pPr indent="0" lvl="0" marL="0" rtl="0" algn="l">
-              <a:spcBef>
-                <a:spcPts val="0"/>
-              </a:spcBef>
-              <a:spcAft>
-                <a:spcPts val="0"/>
-              </a:spcAft>
-              <a:buNone/>
-            </a:pPr>
-            <a:r>
-              <a:rPr lang="en-US"/>
-              <a:t>Data flows down through the tree via props, and each component is a pure function of its props...nothing touches global state, nothing reaches sideways across the tree. This unidirectional flow is kinda the whole reason React apps are easier to reason about than jQuery spaghetti, and it's worth flagging that out loud so students see the design decision behind the mechanics.</a:t>
-            </a:r>
-            <a:endParaRPr/>
+            <a:r>
+              <a:t>Each component is a pure function of its props; nothing reaches sideways across the tree.</a:t>
+            </a:r>
           </a:p>
         </p:txBody>
       </p:sp>
@@ -4479,20 +3887,9 @@
           </a:bodyPr>
           <a:lstStyle/>
           <a:p>
-            <a:pPr indent="0" lvl="0" marL="0" rtl="0" algn="l">
-              <a:spcBef>
-                <a:spcPts val="0"/>
-              </a:spcBef>
-              <a:spcAft>
-                <a:spcPts val="0"/>
-              </a:spcAft>
-              <a:buNone/>
-            </a:pPr>
-            <a:r>
-              <a:rPr lang="en-US"/>
-              <a:t>Set up the problem. Students CAN build UIs with raw DOM methods, they literally just did it in 5.2's exercise. The whole lecture is really about why you wouldn't want to scale that up, and the slide is a soft way in before we show them the actual pain on the next one.</a:t>
-            </a:r>
-            <a:endParaRPr/>
+            <a:r>
+              <a:t>They did this with raw DOM in 5.2's exercise.</a:t>
+            </a:r>
           </a:p>
         </p:txBody>
       </p:sp>
@@ -4630,20 +4027,9 @@
           </a:bodyPr>
           <a:lstStyle/>
           <a:p>
-            <a:pPr indent="0" lvl="0" marL="0" rtl="0" algn="l">
-              <a:spcBef>
-                <a:spcPts val="0"/>
-              </a:spcBef>
-              <a:spcAft>
-                <a:spcPts val="0"/>
-              </a:spcAft>
-              <a:buNone/>
-            </a:pPr>
-            <a:r>
-              <a:rPr lang="en-US"/>
-              <a:t>Data flows down through the tree via props, and each component is a pure function of its props...nothing touches global state, nothing reaches sideways across the tree. This unidirectional flow is kinda the whole reason React apps are easier to reason about than jQuery spaghetti, and it's worth flagging that out loud so students see the design decision behind the mechanics.</a:t>
-            </a:r>
-            <a:endParaRPr/>
+            <a:r>
+              <a:t>Each component is a pure function of its props; nothing reaches sideways across the tree.</a:t>
+            </a:r>
           </a:p>
         </p:txBody>
       </p:sp>
@@ -4781,20 +4167,9 @@
           </a:bodyPr>
           <a:lstStyle/>
           <a:p>
-            <a:pPr indent="0" lvl="0" marL="0" rtl="0" algn="l">
-              <a:spcBef>
-                <a:spcPts val="0"/>
-              </a:spcBef>
-              <a:spcAft>
-                <a:spcPts val="0"/>
-              </a:spcAft>
-              <a:buNone/>
-            </a:pPr>
-            <a:r>
-              <a:rPr lang="en-US"/>
-              <a:t>Three components making one tree here - TodoApp calls TodoList, TodoList maps over the todos to produce a TodoItem each, and TodoItem renders a single li. Notice that TodoList defines its props type inline instead of via interface, which is really fine for small components and kinda not worth the ceremony of a separate interface. The `key={t.id}` is the key prop and the next section explains why it has to be there.</a:t>
-            </a:r>
-            <a:endParaRPr/>
+            <a:r>
+              <a:t>Inline props type is fine for small components. `key` explained next section.</a:t>
+            </a:r>
           </a:p>
         </p:txBody>
       </p:sp>
@@ -4932,20 +4307,9 @@
           </a:bodyPr>
           <a:lstStyle/>
           <a:p>
-            <a:pPr indent="0" lvl="0" marL="0" rtl="0" algn="l">
-              <a:spcBef>
-                <a:spcPts val="0"/>
-              </a:spcBef>
-              <a:spcAft>
-                <a:spcPts val="0"/>
-              </a:spcAft>
-              <a:buNone/>
-            </a:pPr>
-            <a:r>
-              <a:rPr lang="en-US"/>
-              <a:t>Quick 2 minutes. The point is to set up the key prop as the answer to a real problem, not a magic incantation. Things they should reach for: (a) BY POSITION - compare element 0 to old element 0,     element 1 to old element 1, etc. Easy, but wrong: a     deletion in the middle looks like 'three items got     rewritten and one disappeared off the end.' (b) BY CONTENT - diff the text. Works for static text,     breaks for any element with internal state like a     form input or a focused field. (c) BY UNIQUE ID - caller hands React a stable id per     element, React tracks them across re-renders. This     is the right answer and it's exactly the key prop. Once they reach (c) or you walk them there, the next slide formalizes it. Stress that ARRAY INDEX is option (a) wearing a costume - it's the most common wrong answer and the one their AI tools default to.</a:t>
-            </a:r>
-            <a:endParaRPr/>
+            <a:r>
+              <a:t>2 min. Expect by-position and by-content; answer: stable id. Array index is by-position.</a:t>
+            </a:r>
           </a:p>
         </p:txBody>
       </p:sp>
@@ -5083,20 +4447,9 @@
           </a:bodyPr>
           <a:lstStyle/>
           <a:p>
-            <a:pPr indent="0" lvl="0" marL="0" rtl="0" algn="l">
-              <a:spcBef>
-                <a:spcPts val="0"/>
-              </a:spcBef>
-              <a:spcAft>
-                <a:spcPts val="0"/>
-              </a:spcAft>
-              <a:buNone/>
-            </a:pPr>
-            <a:r>
-              <a:rPr lang="en-US"/>
-              <a:t>Keys are really for reconciliation - React uses them to tell 'this todo moved to a new position' apart from 'this old todo was deleted and a new one was added in its place.' For a static list it kinda doesn't matter, but for a list that gets reordered or edited, using the wrong keys causes visible bugs like form inputs retaining the wrong values. USE THE ID. Push your coding agent on this one if it defaults to the array index, because half the time it will.</a:t>
-            </a:r>
-            <a:endParaRPr/>
+            <a:r>
+              <a:t>Wrong keys: form inputs keep the wrong values after a reorder. Check agent output.</a:t>
+            </a:r>
           </a:p>
         </p:txBody>
       </p:sp>
@@ -5234,20 +4587,9 @@
           </a:bodyPr>
           <a:lstStyle/>
           <a:p>
-            <a:pPr indent="0" lvl="0" marL="0" rtl="0" algn="l">
-              <a:spcBef>
-                <a:spcPts val="0"/>
-              </a:spcBef>
-              <a:spcAft>
-                <a:spcPts val="0"/>
-              </a:spcAft>
-              <a:buNone/>
-            </a:pPr>
-            <a:r>
-              <a:rPr lang="en-US"/>
-              <a:t>Keys are really for reconciliation - React uses them to tell 'this todo moved to a new position' apart from 'this old todo was deleted and a new one was added in its place.' For a static list it kinda doesn't matter, but for a list that gets reordered or edited, using the wrong keys causes visible bugs like form inputs retaining the wrong values. USE THE ID. Push your coding agent on this one if it defaults to the array index, because half the time it will.</a:t>
-            </a:r>
-            <a:endParaRPr/>
+            <a:r>
+              <a:t>Wrong keys: form inputs keep the wrong values after a reorder. Check agent output.</a:t>
+            </a:r>
           </a:p>
         </p:txBody>
       </p:sp>
@@ -5384,22 +4726,7 @@
             <a:noAutofit/>
           </a:bodyPr>
           <a:lstStyle/>
-          <a:p>
-            <a:pPr indent="0" lvl="0" marL="0" rtl="0" algn="l">
-              <a:spcBef>
-                <a:spcPts val="0"/>
-              </a:spcBef>
-              <a:spcAft>
-                <a:spcPts val="0"/>
-              </a:spcAft>
-              <a:buNone/>
-            </a:pPr>
-            <a:r>
-              <a:rPr lang="en-US"/>
-              <a:t>It's all really on the one slide here - props typed via interface, an early return for the empty case, .map with a key prop, and every element being a component call. This is the shape of 80% of React list rendering you'll ever write, so students should be able to read it fluently by the end of class.</a:t>
-            </a:r>
-            <a:endParaRPr/>
-          </a:p>
+          <a:p/>
         </p:txBody>
       </p:sp>
       <p:sp>
@@ -5536,20 +4863,9 @@
           </a:bodyPr>
           <a:lstStyle/>
           <a:p>
-            <a:pPr indent="0" lvl="0" marL="0" rtl="0" algn="l">
-              <a:spcBef>
-                <a:spcPts val="0"/>
-              </a:spcBef>
-              <a:spcAft>
-                <a:spcPts val="0"/>
-              </a:spcAft>
-              <a:buNone/>
-            </a:pPr>
-            <a:r>
-              <a:rPr lang="en-US"/>
-              <a:t>The patterns here are a ternary for if/else inside JSX, a short-circuit &amp;&amp; when it's show-or-nothing, and an early return when the whole component branches. All of it is really just plain JavaScript expressions and none of it is React-specific - students already know them from 5.1, they just haven't used them in this context yet.</a:t>
-            </a:r>
-            <a:endParaRPr/>
+            <a:r>
+              <a:t>All plain JS from 5.1, nothing React-specific.</a:t>
+            </a:r>
           </a:p>
         </p:txBody>
       </p:sp>
@@ -5687,20 +5003,9 @@
           </a:bodyPr>
           <a:lstStyle/>
           <a:p>
-            <a:pPr indent="0" lvl="0" marL="0" rtl="0" algn="l">
-              <a:spcBef>
-                <a:spcPts val="0"/>
-              </a:spcBef>
-              <a:spcAft>
-                <a:spcPts val="0"/>
-              </a:spcAft>
-              <a:buNone/>
-            </a:pPr>
-            <a:r>
-              <a:rPr lang="en-US"/>
-              <a:t>The patterns here are a ternary for if/else inside JSX, a short-circuit &amp;&amp; when it's show-or-nothing, and an early return when the whole component branches. All of it is really just plain JavaScript expressions and none of it is React-specific - students already know them from 5.1, they just haven't used them in this context yet.</a:t>
-            </a:r>
-            <a:endParaRPr/>
+            <a:r>
+              <a:t>All plain JS from 5.1, nothing React-specific.</a:t>
+            </a:r>
           </a:p>
         </p:txBody>
       </p:sp>
@@ -5838,20 +5143,9 @@
           </a:bodyPr>
           <a:lstStyle/>
           <a:p>
-            <a:pPr indent="0" lvl="0" marL="0" rtl="0" algn="l">
-              <a:spcBef>
-                <a:spcPts val="0"/>
-              </a:spcBef>
-              <a:spcAft>
-                <a:spcPts val="0"/>
-              </a:spcAft>
-              <a:buNone/>
-            </a:pPr>
-            <a:r>
-              <a:rPr lang="en-US"/>
-              <a:t>Vite is really the standard modern React toolchain at this point. It's a command to create the project, another to install the dependencies, and one more to run the dev server. The dev server has hot module reloading, so save a file and the browser updates without losing state - which is kinda magical the first time you see it. src/App.tsx is the root component. Students should spend at least 10 minutes of this class with a running project open on their own laptop, otherwise none of this sticks.</a:t>
-            </a:r>
-            <a:endParaRPr/>
+            <a:r>
+              <a:t>Demo hot reload keeping state. Then 10 min with a project running on their laptops.</a:t>
+            </a:r>
           </a:p>
         </p:txBody>
       </p:sp>
@@ -5989,231 +5283,9 @@
           </a:bodyPr>
           <a:lstStyle/>
           <a:p>
-            <a:pPr indent="0" lvl="0" marL="0" rtl="0" algn="l">
-              <a:spcBef>
-                <a:spcPts val="0"/>
-              </a:spcBef>
-              <a:spcAft>
-                <a:spcPts val="0"/>
-              </a:spcAft>
-              <a:buNone/>
-            </a:pPr>
-            <a:r>
-              <a:rPr lang="en-US"/>
-              <a:t>Every blank here is really a distinct concept. Todo[] for the props type, destructuring todos from props, .map to produce elements, the key prop, a ternary for className, and todo.title for the text node. Students who can fill all six blanks from memory are ready for 7.1.</a:t>
-            </a:r>
-            <a:endParaRPr/>
-          </a:p>
-          <a:p>
-            <a:pPr indent="0" lvl="0" marL="0" rtl="0" algn="l">
-              <a:spcBef>
-                <a:spcPts val="0"/>
-              </a:spcBef>
-              <a:spcAft>
-                <a:spcPts val="0"/>
-              </a:spcAft>
-              <a:buClr>
-                <a:schemeClr val="dk1"/>
-              </a:buClr>
-              <a:buFont typeface="Arial"/>
-              <a:buNone/>
-            </a:pPr>
-            <a:r>
-              <a:t/>
-            </a:r>
-            <a:endParaRPr sz="1000">
-              <a:solidFill>
-                <a:schemeClr val="dk1"/>
-              </a:solidFill>
-            </a:endParaRPr>
-          </a:p>
-          <a:p>
-            <a:pPr indent="0" lvl="0" marL="0" rtl="0" algn="l">
-              <a:spcBef>
-                <a:spcPts val="200"/>
-              </a:spcBef>
-              <a:spcAft>
-                <a:spcPts val="0"/>
-              </a:spcAft>
-              <a:buClr>
-                <a:schemeClr val="dk1"/>
-              </a:buClr>
-              <a:buFont typeface="Arial"/>
-              <a:buNone/>
-            </a:pPr>
-            <a:r>
-              <a:rPr b="1" lang="en-US" sz="900">
-                <a:solidFill>
-                  <a:srgbClr val="333344"/>
-                </a:solidFill>
-                <a:latin typeface="Courier New"/>
-                <a:ea typeface="Courier New"/>
-                <a:cs typeface="Courier New"/>
-                <a:sym typeface="Courier New"/>
-              </a:rPr>
-              <a:t>todos: Todo[];</a:t>
-            </a:r>
-            <a:endParaRPr b="1" sz="900">
-              <a:solidFill>
-                <a:srgbClr val="333344"/>
-              </a:solidFill>
-              <a:latin typeface="Courier New"/>
-              <a:ea typeface="Courier New"/>
-              <a:cs typeface="Courier New"/>
-              <a:sym typeface="Courier New"/>
-            </a:endParaRPr>
-          </a:p>
-          <a:p>
-            <a:pPr indent="0" lvl="0" marL="0" rtl="0" algn="l">
-              <a:spcBef>
-                <a:spcPts val="200"/>
-              </a:spcBef>
-              <a:spcAft>
-                <a:spcPts val="0"/>
-              </a:spcAft>
-              <a:buClr>
-                <a:schemeClr val="dk1"/>
-              </a:buClr>
-              <a:buFont typeface="Arial"/>
-              <a:buNone/>
-            </a:pPr>
-            <a:r>
-              <a:rPr b="1" lang="en-US" sz="900">
-                <a:solidFill>
-                  <a:srgbClr val="333344"/>
-                </a:solidFill>
-                <a:latin typeface="Courier New"/>
-                <a:ea typeface="Courier New"/>
-                <a:cs typeface="Courier New"/>
-                <a:sym typeface="Courier New"/>
-              </a:rPr>
-              <a:t>function TodoList({ todos }: TodoListProps) {</a:t>
-            </a:r>
-            <a:endParaRPr sz="1000">
-              <a:solidFill>
-                <a:schemeClr val="dk1"/>
-              </a:solidFill>
-            </a:endParaRPr>
-          </a:p>
-          <a:p>
-            <a:pPr indent="0" lvl="0" marL="0" rtl="0" algn="l">
-              <a:spcBef>
-                <a:spcPts val="200"/>
-              </a:spcBef>
-              <a:spcAft>
-                <a:spcPts val="0"/>
-              </a:spcAft>
-              <a:buClr>
-                <a:schemeClr val="dk1"/>
-              </a:buClr>
-              <a:buFont typeface="Arial"/>
-              <a:buNone/>
-            </a:pPr>
-            <a:r>
-              <a:rPr b="1" lang="en-US" sz="900">
-                <a:solidFill>
-                  <a:srgbClr val="333344"/>
-                </a:solidFill>
-                <a:latin typeface="Courier New"/>
-                <a:ea typeface="Courier New"/>
-                <a:cs typeface="Courier New"/>
-                <a:sym typeface="Courier New"/>
-              </a:rPr>
-              <a:t>            {todos.map((todo) =&gt; (</a:t>
-            </a:r>
-            <a:endParaRPr sz="1000">
-              <a:solidFill>
-                <a:schemeClr val="dk1"/>
-              </a:solidFill>
-            </a:endParaRPr>
-          </a:p>
-          <a:p>
-            <a:pPr indent="0" lvl="0" marL="0" rtl="0" algn="l">
-              <a:spcBef>
-                <a:spcPts val="200"/>
-              </a:spcBef>
-              <a:spcAft>
-                <a:spcPts val="0"/>
-              </a:spcAft>
-              <a:buClr>
-                <a:schemeClr val="dk1"/>
-              </a:buClr>
-              <a:buFont typeface="Arial"/>
-              <a:buNone/>
-            </a:pPr>
-            <a:r>
-              <a:rPr b="1" lang="en-US" sz="900">
-                <a:solidFill>
-                  <a:srgbClr val="333344"/>
-                </a:solidFill>
-                <a:latin typeface="Courier New"/>
-                <a:ea typeface="Courier New"/>
-                <a:cs typeface="Courier New"/>
-                <a:sym typeface="Courier New"/>
-              </a:rPr>
-              <a:t>                    key={todo.id}</a:t>
-            </a:r>
-            <a:endParaRPr sz="1000">
-              <a:solidFill>
-                <a:schemeClr val="dk1"/>
-              </a:solidFill>
-            </a:endParaRPr>
-          </a:p>
-          <a:p>
-            <a:pPr indent="0" lvl="0" marL="0" rtl="0" algn="l">
-              <a:spcBef>
-                <a:spcPts val="200"/>
-              </a:spcBef>
-              <a:spcAft>
-                <a:spcPts val="0"/>
-              </a:spcAft>
-              <a:buNone/>
-            </a:pPr>
-            <a:r>
-              <a:rPr b="1" lang="en-US" sz="900">
-                <a:solidFill>
-                  <a:srgbClr val="333344"/>
-                </a:solidFill>
-                <a:latin typeface="Courier New"/>
-                <a:ea typeface="Courier New"/>
-                <a:cs typeface="Courier New"/>
-                <a:sym typeface="Courier New"/>
-              </a:rPr>
-              <a:t>                    className={todo.done ? "done" : ""}</a:t>
-            </a:r>
-            <a:endParaRPr sz="1000">
-              <a:solidFill>
-                <a:schemeClr val="dk1"/>
-              </a:solidFill>
-            </a:endParaRPr>
-          </a:p>
-          <a:p>
-            <a:pPr indent="0" lvl="0" marL="0" rtl="0" algn="l">
-              <a:spcBef>
-                <a:spcPts val="200"/>
-              </a:spcBef>
-              <a:spcAft>
-                <a:spcPts val="0"/>
-              </a:spcAft>
-              <a:buClr>
-                <a:schemeClr val="dk1"/>
-              </a:buClr>
-              <a:buFont typeface="Arial"/>
-              <a:buNone/>
-            </a:pPr>
-            <a:r>
-              <a:rPr b="1" lang="en-US" sz="900">
-                <a:solidFill>
-                  <a:srgbClr val="333344"/>
-                </a:solidFill>
-                <a:latin typeface="Courier New"/>
-                <a:ea typeface="Courier New"/>
-                <a:cs typeface="Courier New"/>
-                <a:sym typeface="Courier New"/>
-              </a:rPr>
-              <a:t>                    {todo.title}</a:t>
-            </a:r>
-            <a:endParaRPr sz="1000"/>
+            <a:r>
+              <a:t>Answers: Todo[], todos, map, key, "done", todo.title.</a:t>
+            </a:r>
           </a:p>
         </p:txBody>
       </p:sp>
@@ -6351,20 +5423,9 @@
           </a:bodyPr>
           <a:lstStyle/>
           <a:p>
-            <a:pPr indent="0" lvl="0" marL="0" rtl="0" algn="l">
-              <a:spcBef>
-                <a:spcPts val="0"/>
-              </a:spcBef>
-              <a:spcAft>
-                <a:spcPts val="0"/>
-              </a:spcAft>
-              <a:buNone/>
-            </a:pPr>
-            <a:r>
-              <a:rPr lang="en-US"/>
-              <a:t>Set up the problem. Students CAN build UIs with raw DOM methods, they literally just did it in 5.2's exercise. The whole lecture is really about why you wouldn't want to scale that up, and the slide is a soft way in before we show them the actual pain on the next one.</a:t>
-            </a:r>
-            <a:endParaRPr/>
+            <a:r>
+              <a:t>They did this with raw DOM in 5.2's exercise.</a:t>
+            </a:r>
           </a:p>
         </p:txBody>
       </p:sp>
@@ -6502,20 +5563,9 @@
           </a:bodyPr>
           <a:lstStyle/>
           <a:p>
-            <a:pPr indent="0" lvl="0" marL="0" rtl="0" algn="l">
-              <a:spcBef>
-                <a:spcPts val="0"/>
-              </a:spcBef>
-              <a:spcAft>
-                <a:spcPts val="0"/>
-              </a:spcAft>
-              <a:buNone/>
-            </a:pPr>
-            <a:r>
-              <a:rPr lang="en-US"/>
-              <a:t>Walk through each answer. Really point out that this component is PURE - same todos array in, same JSX out, every single time, with no side effects and no mutation. That's what makes it testable and easy to reason about, and it's kinda the whole point of the lecture showing up in eight lines. When the todos array changes next lecture via useState, React re-runs this function and updates only the &lt;li&gt;s that actually changed.</a:t>
-            </a:r>
-            <a:endParaRPr/>
+            <a:r>
+              <a:t>Pure: same todos in, same JSX out. Next lecture useState changes the array.</a:t>
+            </a:r>
           </a:p>
         </p:txBody>
       </p:sp>
@@ -6653,20 +5703,9 @@
           </a:bodyPr>
           <a:lstStyle/>
           <a:p>
-            <a:pPr indent="0" lvl="0" marL="0" rtl="0" algn="l">
-              <a:spcBef>
-                <a:spcPts val="0"/>
-              </a:spcBef>
-              <a:spcAft>
-                <a:spcPts val="0"/>
-              </a:spcAft>
-              <a:buNone/>
-            </a:pPr>
-            <a:r>
-              <a:rPr lang="en-US"/>
-              <a:t>Read the slide as written, the categories do the work. The idea is to show the SAME TodoList in four different syntaxes on the next four slides, so students can read each one and see the differences themselves rather than be told. Worth saying out loud: React won the mindshare war but didn't win on technical merit alone - Vue, Svelte, and Solid are all arguably better-designed in specific ways. React won because of timing, Facebook's backing, and the network effect of the ecosystem. The lesson really isn't 'React is right,' it's 'React is what your job will use.' Quick name-drop honorable mentions if students ask: Preact, Web Components / Lit, Alpine.js, Qwik.</a:t>
-            </a:r>
-            <a:endParaRPr/>
+            <a:r>
+              <a:t>React won on timing, Facebook, ecosystem. Honorable mentions if asked: Preact, Lit, Alpine, Qwik.</a:t>
+            </a:r>
           </a:p>
         </p:txBody>
       </p:sp>
@@ -6804,20 +5843,9 @@
           </a:bodyPr>
           <a:lstStyle/>
           <a:p>
-            <a:pPr indent="0" lvl="0" marL="0" rtl="0" algn="l">
-              <a:spcBef>
-                <a:spcPts val="0"/>
-              </a:spcBef>
-              <a:spcAft>
-                <a:spcPts val="0"/>
-              </a:spcAft>
-              <a:buNone/>
-            </a:pPr>
-            <a:r>
-              <a:rPr lang="en-US"/>
-              <a:t>Read the slide as written, the categories do the work. The idea is to show the SAME TodoList in four different syntaxes on the next four slides, so students can read each one and see the differences themselves rather than be told. Worth saying out loud: React won the mindshare war but didn't win on technical merit alone - Vue, Svelte, and Solid are all arguably better-designed in specific ways. React won because of timing, Facebook's backing, and the network effect of the ecosystem. The lesson really isn't 'React is right,' it's 'React is what your job will use.' Quick name-drop honorable mentions if students ask: Preact, Web Components / Lit, Alpine.js, Qwik.</a:t>
-            </a:r>
-            <a:endParaRPr/>
+            <a:r>
+              <a:t>React won on timing, Facebook, ecosystem. Honorable mentions if asked: Preact, Lit, Alpine, Qwik.</a:t>
+            </a:r>
           </a:p>
         </p:txBody>
       </p:sp>
@@ -6955,20 +5983,9 @@
           </a:bodyPr>
           <a:lstStyle/>
           <a:p>
-            <a:pPr indent="0" lvl="0" marL="0" rtl="0" algn="l">
-              <a:spcBef>
-                <a:spcPts val="0"/>
-              </a:spcBef>
-              <a:spcAft>
-                <a:spcPts val="0"/>
-              </a:spcAft>
-              <a:buNone/>
-            </a:pPr>
-            <a:r>
-              <a:rPr lang="en-US"/>
-              <a:t>Vue's hello-world feels familiar to anyone coming from React: declarative, tree of components, props down. Differences worth pointing at: (a) markup-as-template with v-for and :class directives instead of JS expressions, (b) {{ t.title }} for interpolation instead of {t.title}, (c) `:key` is a directive on the tag rather than a prop. Single-file components (.vue) bundle template + script + styles together, which a lot of people prefer over React's everything-is-JS approach. Vue's reactivity is automatic - mutate `todos` and the UI updates without telling Vue you did so.</a:t>
-            </a:r>
-            <a:endParaRPr/>
+            <a:r>
+              <a:t>Directives in markup, `{{ }}` interpolation, `:key` on the tag. Mutating `todos` updates UI automatically.</a:t>
+            </a:r>
           </a:p>
         </p:txBody>
       </p:sp>
@@ -7106,20 +6123,9 @@
           </a:bodyPr>
           <a:lstStyle/>
           <a:p>
-            <a:pPr indent="0" lvl="0" marL="0" rtl="0" algn="l">
-              <a:spcBef>
-                <a:spcPts val="0"/>
-              </a:spcBef>
-              <a:spcAft>
-                <a:spcPts val="0"/>
-              </a:spcAft>
-              <a:buNone/>
-            </a:pPr>
-            <a:r>
-              <a:rPr lang="en-US"/>
-              <a:t>Svelte looks structurally like Vue but the magic is at BUILD TIME instead of run time. The compiler reads this component and emits hand-rolled DOM-mutation code, the same kind of code we put up on the vanilla-JS slide, so the browser never runs a virtual-DOM diff at all...which gets you the smallest bundle of any of these frameworks and the fastest first paint. {#each ... as t (t.id)} is the loop with key tracking; class:done={t.done} conditionally applies the .done class. Worth saying: a lot of people think Svelte has the best developer experience of the bunch - React just has the bigger ecosystem.</a:t>
-            </a:r>
-            <a:endParaRPr/>
+            <a:r>
+              <a:t>Same code as the vanilla-JS slide, emitted by the compiler. Smallest bundle, no virtual-DOM diff.</a:t>
+            </a:r>
           </a:p>
         </p:txBody>
       </p:sp>
@@ -7257,20 +6263,9 @@
           </a:bodyPr>
           <a:lstStyle/>
           <a:p>
-            <a:pPr indent="0" lvl="0" marL="0" rtl="0" algn="l">
-              <a:spcBef>
-                <a:spcPts val="0"/>
-              </a:spcBef>
-              <a:spcAft>
-                <a:spcPts val="0"/>
-              </a:spcAft>
-              <a:buNone/>
-            </a:pPr>
-            <a:r>
-              <a:rPr lang="en-US"/>
-              <a:t>HTMX is the 'frameworks were a mistake' answer. There's no React, no Vue, no Svelte - just HTML attributes that tell the browser when to make HTTP requests and where to put the response. Your server (Django, Rails, Go, whatever) returns HTML fragments instead of JSON, and the page assembles itself out of pieces. Tradeoffs: way less code on the frontend and works without JS at all, but every interaction is a server roundtrip and rich client-side state is hard. It's having a real moment in shops that resented SPA complexity. Pair it with Hotwire if students hear that name - same idea from the Rails world.</a:t>
-            </a:r>
-            <a:endParaRPr/>
+            <a:r>
+              <a:t>Tradeoff: every interaction roundtrips, rich client state is hard. Hotwire is the Rails equivalent.</a:t>
+            </a:r>
           </a:p>
         </p:txBody>
       </p:sp>
@@ -7407,22 +6402,7 @@
             <a:noAutofit/>
           </a:bodyPr>
           <a:lstStyle/>
-          <a:p>
-            <a:pPr indent="0" lvl="0" marL="0" rtl="0" algn="l">
-              <a:spcBef>
-                <a:spcPts val="0"/>
-              </a:spcBef>
-              <a:spcAft>
-                <a:spcPts val="0"/>
-              </a:spcAft>
-              <a:buNone/>
-            </a:pPr>
-            <a:r>
-              <a:rPr lang="en-US"/>
-              <a:t>Takeaways first, then really flag what's missing. Students should feel the gap - they can build a static UI today but not a dynamic one, and the gap is kinda the whole hook for 7.1 where useState and useEffect fill it in.</a:t>
-            </a:r>
-            <a:endParaRPr/>
-          </a:p>
+          <a:p/>
         </p:txBody>
       </p:sp>
       <p:sp>
@@ -7558,22 +6538,7 @@
             <a:noAutofit/>
           </a:bodyPr>
           <a:lstStyle/>
-          <a:p>
-            <a:pPr indent="0" lvl="0" marL="0" rtl="0" algn="l">
-              <a:spcBef>
-                <a:spcPts val="0"/>
-              </a:spcBef>
-              <a:spcAft>
-                <a:spcPts val="0"/>
-              </a:spcAft>
-              <a:buNone/>
-            </a:pPr>
-            <a:r>
-              <a:rPr lang="en-US"/>
-              <a:t>Set up the problem first: components have no memory on their own. Show why plain local variables don't work before reaching for the hook that fixes it.</a:t>
-            </a:r>
-            <a:endParaRPr/>
-          </a:p>
+          <a:p/>
         </p:txBody>
       </p:sp>
       <p:sp>
@@ -7709,22 +6674,7 @@
             <a:noAutofit/>
           </a:bodyPr>
           <a:lstStyle/>
-          <a:p>
-            <a:pPr indent="0" lvl="0" marL="0" rtl="0" algn="l">
-              <a:spcBef>
-                <a:spcPts val="0"/>
-              </a:spcBef>
-              <a:spcAft>
-                <a:spcPts val="0"/>
-              </a:spcAft>
-              <a:buNone/>
-            </a:pPr>
-            <a:r>
-              <a:rPr lang="en-US"/>
-              <a:t>Frame the class directly - today unlocks everything 6.1 pointed at but didn't actually deliver. These two concepts (state and effects) are really the only things standing between students and real interactive React apps, which is kinda why 7.1 is the most important lecture of the React unit.</a:t>
-            </a:r>
-            <a:endParaRPr/>
-          </a:p>
+          <a:p/>
         </p:txBody>
       </p:sp>
       <p:sp>
@@ -7861,20 +6811,9 @@
           </a:bodyPr>
           <a:lstStyle/>
           <a:p>
-            <a:pPr indent="0" lvl="0" marL="0" rtl="0" algn="l">
-              <a:spcBef>
-                <a:spcPts val="0"/>
-              </a:spcBef>
-              <a:spcAft>
-                <a:spcPts val="0"/>
-              </a:spcAft>
-              <a:buNone/>
-            </a:pPr>
-            <a:r>
-              <a:rPr lang="en-US"/>
-              <a:t>This slide is the motivation for everything that follows, so don't rush past it. Students need to feel TWO separate problems: React doesn't know to re-render, and even if it did, local variables restart from zero on every call. Memory has to LIVE SOMEWHERE ELSE...and the 'somewhere else' is the whole point of useState on the next slide.</a:t>
-            </a:r>
-            <a:endParaRPr/>
+            <a:r>
+              <a:t>Two separate problems: no re-render trigger, and `count` resets on every call. Don't rush.</a:t>
+            </a:r>
           </a:p>
         </p:txBody>
       </p:sp>
@@ -8012,20 +6951,9 @@
           </a:bodyPr>
           <a:lstStyle/>
           <a:p>
-            <a:pPr indent="0" lvl="0" marL="0" rtl="0" algn="l">
-              <a:spcBef>
-                <a:spcPts val="0"/>
-              </a:spcBef>
-              <a:spcAft>
-                <a:spcPts val="0"/>
-              </a:spcAft>
-              <a:buNone/>
-            </a:pPr>
-            <a:r>
-              <a:rPr lang="en-US"/>
-              <a:t>AbortController is the modern, idiomatic answer. It's also EXACTLY the pattern React's useEffect cleanup uses, which is a really nice forward-reference for next class - when they see useEffect returning a cleanup function, they'll recognize this. Walk through it: each new call aborts the previous controller, makes a fresh one, passes the signal into fetch, and the catch ignores AbortError because that rejection was on purpose. The alternative pattern, where you track a request id and ignore the stale responses, works fine too - AbortController just also saves you the network round trip on the way.</a:t>
-            </a:r>
-            <a:endParaRPr/>
+            <a:r>
+              <a:t>Abort previous, new controller, pass signal, catch ignores AbortError. Same shape as useEffect cleanup.</a:t>
+            </a:r>
           </a:p>
         </p:txBody>
       </p:sp>
@@ -8163,20 +7091,9 @@
           </a:bodyPr>
           <a:lstStyle/>
           <a:p>
-            <a:pPr indent="0" lvl="0" marL="0" rtl="0" algn="l">
-              <a:spcBef>
-                <a:spcPts val="0"/>
-              </a:spcBef>
-              <a:spcAft>
-                <a:spcPts val="0"/>
-              </a:spcAft>
-              <a:buNone/>
-            </a:pPr>
-            <a:r>
-              <a:rPr lang="en-US"/>
-              <a:t>This slide is the motivation for everything that follows, so don't rush past it. Students need to feel TWO separate problems: React doesn't know to re-render, and even if it did, local variables restart from zero on every call. Memory has to LIVE SOMEWHERE ELSE...and the 'somewhere else' is the whole point of useState on the next slide.</a:t>
-            </a:r>
-            <a:endParaRPr/>
+            <a:r>
+              <a:t>Two separate problems: no re-render trigger, and `count` resets on every call. Don't rush.</a:t>
+            </a:r>
           </a:p>
         </p:txBody>
       </p:sp>
@@ -8313,22 +7230,7 @@
             <a:noAutofit/>
           </a:bodyPr>
           <a:lstStyle/>
-          <a:p>
-            <a:pPr indent="0" lvl="0" marL="0" rtl="0" algn="l">
-              <a:spcBef>
-                <a:spcPts val="0"/>
-              </a:spcBef>
-              <a:spcAft>
-                <a:spcPts val="0"/>
-              </a:spcAft>
-              <a:buNone/>
-            </a:pPr>
-            <a:r>
-              <a:rPr lang="en-US"/>
-              <a:t>The hook itself. Memory between renders, one line at a time.</a:t>
-            </a:r>
-            <a:endParaRPr/>
-          </a:p>
+          <a:p/>
         </p:txBody>
       </p:sp>
       <p:sp>
@@ -8465,20 +7367,9 @@
           </a:bodyPr>
           <a:lstStyle/>
           <a:p>
-            <a:pPr indent="0" lvl="0" marL="0" rtl="0" algn="l">
-              <a:spcBef>
-                <a:spcPts val="0"/>
-              </a:spcBef>
-              <a:spcAft>
-                <a:spcPts val="0"/>
-              </a:spcAft>
-              <a:buNone/>
-            </a:pPr>
-            <a:r>
-              <a:rPr lang="en-US"/>
-              <a:t>The two-thing shape of useState's return value is the single most confusing part for students who are new to hooks. Hammer on it: you always destructure it, you always call it at the top of the component, and the names are technically up to you but the convention everybody reads is [thing, setThing]. If their coding agent writes [thingState, updateThing], push it back toward the convention - readability across the ecosystem matters.</a:t>
-            </a:r>
-            <a:endParaRPr/>
+            <a:r>
+              <a:t>Always destructure, always at top of component. Convention: [thing, setThing], fix agent output that deviates.</a:t>
+            </a:r>
           </a:p>
         </p:txBody>
       </p:sp>
@@ -8616,20 +7507,9 @@
           </a:bodyPr>
           <a:lstStyle/>
           <a:p>
-            <a:pPr indent="0" lvl="0" marL="0" rtl="0" algn="l">
-              <a:spcBef>
-                <a:spcPts val="0"/>
-              </a:spcBef>
-              <a:spcAft>
-                <a:spcPts val="0"/>
-              </a:spcAft>
-              <a:buNone/>
-            </a:pPr>
-            <a:r>
-              <a:rPr lang="en-US"/>
-              <a:t>The working version is literally three lines different from the broken one - import useState, declare with [count, setCount] = useState(0), and call setCount in the handler. The UI actually updates because calling the setter is the signal to React that state changed and a re-render is needed. Make the diff visible, don't just let students read the new version.</a:t>
-            </a:r>
-            <a:endParaRPr/>
+            <a:r>
+              <a:t>Show the diff from BrokenCounter: import, useState line, setCount in handler.</a:t>
+            </a:r>
           </a:p>
         </p:txBody>
       </p:sp>
@@ -8767,51 +7647,9 @@
           </a:bodyPr>
           <a:lstStyle/>
           <a:p>
-            <a:pPr indent="0" lvl="0" marL="0" rtl="0" algn="l">
-              <a:spcBef>
-                <a:spcPts val="0"/>
-              </a:spcBef>
-              <a:spcAft>
-                <a:spcPts val="0"/>
-              </a:spcAft>
-              <a:buNone/>
-            </a:pPr>
-            <a:r>
-              <a:rPr lang="en-US"/>
-              <a:t>Any closure (like an onClick) that captures count captures that render's value, even if state changes later.</a:t>
-            </a:r>
-            <a:endParaRPr/>
-          </a:p>
-          <a:p>
-            <a:pPr indent="0" lvl="0" marL="0" rtl="0" algn="l">
-              <a:spcBef>
-                <a:spcPts val="0"/>
-              </a:spcBef>
-              <a:spcAft>
-                <a:spcPts val="0"/>
-              </a:spcAft>
-              <a:buNone/>
-            </a:pPr>
-            <a:r>
-              <a:t/>
-            </a:r>
-            <a:endParaRPr/>
-          </a:p>
-          <a:p>
-            <a:pPr indent="0" lvl="0" marL="0" rtl="0" algn="l">
-              <a:spcBef>
-                <a:spcPts val="0"/>
-              </a:spcBef>
-              <a:spcAft>
-                <a:spcPts val="0"/>
-              </a:spcAft>
-              <a:buNone/>
-            </a:pPr>
-            <a:r>
-              <a:rPr lang="en-US"/>
-              <a:t>The 'React keeps it in its own memory' mental model is really what unlocks the intuition for hooks. Students who believe count is 'just a variable' get confused by closure bugs for weeks...students who believe React is storing it somewhere else understand that the function is just asking React for the current value every run. That framing does a lot of work later when we hit useEffect.</a:t>
-            </a:r>
-            <a:endParaRPr/>
+            <a:r>
+              <a:t>Closures (onClick) capture that render's value even if state changes later.</a:t>
+            </a:r>
           </a:p>
         </p:txBody>
       </p:sp>
@@ -8949,20 +7787,9 @@
           </a:bodyPr>
           <a:lstStyle/>
           <a:p>
-            <a:pPr indent="0" lvl="0" marL="0" rtl="0" algn="l">
-              <a:spcBef>
-                <a:spcPts val="0"/>
-              </a:spcBef>
-              <a:spcAft>
-                <a:spcPts val="0"/>
-              </a:spcAft>
-              <a:buNone/>
-            </a:pPr>
-            <a:r>
-              <a:rPr lang="en-US"/>
-              <a:t>Each useState is independent of the others. You can have as many as you need. The one rule is that they have to be called in the same ORDER on every render, which really just means no useState inside if statements or loops. React tracks them by call order, not by name...which is kinda wild the first time you learn it.</a:t>
-            </a:r>
-            <a:endParaRPr/>
+            <a:r>
+              <a:t>Same call order every render, no useState inside if/loops. React tracks hooks by call order.</a:t>
+            </a:r>
           </a:p>
         </p:txBody>
       </p:sp>
@@ -9100,20 +7927,9 @@
           </a:bodyPr>
           <a:lstStyle/>
           <a:p>
-            <a:pPr indent="0" lvl="0" marL="0" rtl="0" algn="l">
-              <a:spcBef>
-                <a:spcPts val="0"/>
-              </a:spcBef>
-              <a:spcAft>
-                <a:spcPts val="0"/>
-              </a:spcAft>
-              <a:buNone/>
-            </a:pPr>
-            <a:r>
-              <a:rPr lang="en-US"/>
-              <a:t>Students should pretty much memorize this loop - it's the foundation for every React debugging intuition they'll ever need. When something doesn't update, trace through: which step is broken? Usually it's step 2 (forgot to call the setter in the first place) or step 7 (React saw the same reference and skipped the update). If their coding agent produces 'my state isn't updating' bugs, this is the slide to push them back to.</a:t>
-            </a:r>
-            <a:endParaRPr/>
+            <a:r>
+              <a:t>Debug by step: usually 2 (setter never called) or 7 (same reference, diff skipped).</a:t>
+            </a:r>
           </a:p>
         </p:txBody>
       </p:sp>
@@ -9251,20 +8067,9 @@
           </a:bodyPr>
           <a:lstStyle/>
           <a:p>
-            <a:pPr indent="0" lvl="0" marL="0" rtl="0" algn="l">
-              <a:spcBef>
-                <a:spcPts val="0"/>
-              </a:spcBef>
-              <a:spcAft>
-                <a:spcPts val="0"/>
-              </a:spcAft>
-              <a:buNone/>
-            </a:pPr>
-            <a:r>
-              <a:rPr lang="en-US"/>
-              <a:t>AbortController is the modern, idiomatic answer. It's also EXACTLY the pattern React's useEffect cleanup uses, which is a really nice forward-reference for next class - when they see useEffect returning a cleanup function, they'll recognize this. Walk through it: each new call aborts the previous controller, makes a fresh one, passes the signal into fetch, and the catch ignores AbortError because that rejection was on purpose. The alternative pattern, where you track a request id and ignore the stale responses, works fine too - AbortController just also saves you the network round trip on the way.</a:t>
-            </a:r>
-            <a:endParaRPr/>
+            <a:r>
+              <a:t>Abort previous, new controller, pass signal, catch ignores AbortError. Same shape as useEffect cleanup.</a:t>
+            </a:r>
           </a:p>
         </p:txBody>
       </p:sp>
@@ -9402,20 +8207,9 @@
           </a:bodyPr>
           <a:lstStyle/>
           <a:p>
-            <a:pPr indent="0" lvl="0" marL="0" rtl="0" algn="l">
-              <a:spcBef>
-                <a:spcPts val="0"/>
-              </a:spcBef>
-              <a:spcAft>
-                <a:spcPts val="0"/>
-              </a:spcAft>
-              <a:buNone/>
-            </a:pPr>
-            <a:r>
-              <a:rPr lang="en-US"/>
-              <a:t>Three manual updates for one state change. Walk through each - list rebuild, counter text, empty-state visibility - and then ask students to imagine an app with fifteen pieces of UI depending on the data instead of three. Every state change means remembering to touch every affected element, miss ONE and the UI silently lies about what the data says. This is kinda the canonical bug in vanilla-JS frontends and it's worth naming out loud. Don't reveal the React flip yet - next slide hands the question to them.</a:t>
-            </a:r>
-            <a:endParaRPr/>
+            <a:r>
+              <a:t>Walk through the three updates. Ask: now fifteen pieces of UI. Don't reveal React yet.</a:t>
+            </a:r>
           </a:p>
         </p:txBody>
       </p:sp>
@@ -9553,20 +8347,9 @@
           </a:bodyPr>
           <a:lstStyle/>
           <a:p>
-            <a:pPr indent="0" lvl="0" marL="0" rtl="0" algn="l">
-              <a:spcBef>
-                <a:spcPts val="0"/>
-              </a:spcBef>
-              <a:spcAft>
-                <a:spcPts val="0"/>
-              </a:spcAft>
-              <a:buNone/>
-            </a:pPr>
-            <a:r>
-              <a:rPr lang="en-US"/>
-              <a:t>Give them 3 minutes, cold-call two pairs. The point is to surface React's thesis from the students' own instincts rather than handing it to them. Things they should reach for: (a) DECLARATIVE - describe what the UI looks like for a given data, not the steps to mutate the DOM. (b) ONE SOURCE OF TRUTH - the data is canonical, the     UI is downstream of it. (c) FRAMEWORK DOES THE DIFF - developer hands over a description, framework figures out what changed. (d) RE-RENDER EVERYTHING (logically) - if the function is pure, just call it again whenever data changes; let the framework be smart about the actual DOM updates. Leave their answers on the board, then flip to the next slide where React's answer validates the same shape.</a:t>
-            </a:r>
-            <a:endParaRPr/>
+            <a:r>
+              <a:t>3 min, two pairs, answers on board. Want: declarative, one source of truth, framework diffs.</a:t>
+            </a:r>
           </a:p>
         </p:txBody>
       </p:sp>
@@ -9704,20 +8487,9 @@
           </a:bodyPr>
           <a:lstStyle/>
           <a:p>
-            <a:pPr indent="0" lvl="0" marL="0" rtl="0" algn="l">
-              <a:spcBef>
-                <a:spcPts val="0"/>
-              </a:spcBef>
-              <a:spcAft>
-                <a:spcPts val="0"/>
-              </a:spcAft>
-              <a:buNone/>
-            </a:pPr>
-            <a:r>
-              <a:rPr lang="en-US"/>
-              <a:t>If students walk out with nothing but this slide they still have the right mental model...and if they walk out with all the other mechanics but not this one, they'll write React that looks suspiciously like vanilla JS, which is a super common gripe I have with AI-generated React code.</a:t>
-            </a:r>
-            <a:endParaRPr/>
+            <a:r>
+              <a:t>Mention: AI-generated React often still touches the DOM by hand.</a:t>
+            </a:r>
           </a:p>
         </p:txBody>
       </p:sp>

--- a/lectures/Lecture 6.1 - React.pptx
+++ b/lectures/Lecture 6.1 - React.pptx
@@ -1823,6 +1823,23 @@
               <a:t>Same move as async/await in 5.2. Modern build emits `_jsxs`; children live under props.</a:t>
             </a:r>
           </a:p>
+          <a:p/>
+          <a:p>
+            <a:r>
+              <a:t>createElement(type, props, ...children)</a:t>
+            </a:r>
+          </a:p>
+          <a:p>
+            <a:r>
+              <a:t>null = props in the header h1</a:t>
+            </a:r>
+          </a:p>
+          <a:p/>
+          <a:p>
+            <a:r>
+              <a:t>_jsxs("h1", { children: ["Hello, ", name, "!"] })</a:t>
+            </a:r>
+          </a:p>
         </p:txBody>
       </p:sp>
       <p:sp>
@@ -1961,6 +1978,23 @@
           <a:p>
             <a:r>
               <a:t>Same move as async/await in 5.2. Modern build emits `_jsxs`; children live under props.</a:t>
+            </a:r>
+          </a:p>
+          <a:p/>
+          <a:p>
+            <a:r>
+              <a:t>createElement(type, props, ...children)</a:t>
+            </a:r>
+          </a:p>
+          <a:p>
+            <a:r>
+              <a:t>null = props in the header h1</a:t>
+            </a:r>
+          </a:p>
+          <a:p/>
+          <a:p>
+            <a:r>
+              <a:t>_jsxs("h1", { children: ["Hello, ", name, "!"] })</a:t>
             </a:r>
           </a:p>
         </p:txBody>
@@ -5285,6 +5319,37 @@
           <a:p>
             <a:r>
               <a:t>Answers: Todo[], todos, map, key, "done", todo.title.</a:t>
+            </a:r>
+          </a:p>
+          <a:p/>
+          <a:p>
+            <a:r>
+              <a:t>todos: Todo[];</a:t>
+            </a:r>
+          </a:p>
+          <a:p>
+            <a:r>
+              <a:t>function TodoList({ todos }: TodoListProps) {</a:t>
+            </a:r>
+          </a:p>
+          <a:p>
+            <a:r>
+              <a:t>            {todos.map((todo) =&gt; (</a:t>
+            </a:r>
+          </a:p>
+          <a:p>
+            <a:r>
+              <a:t>                    key={todo.id}</a:t>
+            </a:r>
+          </a:p>
+          <a:p>
+            <a:r>
+              <a:t>                    className={todo.done ? "done" : ""}</a:t>
+            </a:r>
+          </a:p>
+          <a:p>
+            <a:r>
+              <a:t>                    {todo.title}</a:t>
             </a:r>
           </a:p>
         </p:txBody>
